--- a/tests/testresults/script_IQSlidedeck_IQ.pptx
+++ b/tests/testresults/script_IQSlidedeck_IQ.pptx
@@ -10171,7 +10171,7 @@
           <a:p>
             <a:r>
               <a:rPr/>
-              <a:t>2026-06-09</a:t>
+              <a:t>2026-06-25</a:t>
             </a:r>
           </a:p>
         </p:txBody>
@@ -10336,7 +10336,7 @@
           <a:p>
             <a:r>
               <a:rPr/>
-              <a:t>script_IQSlidedeck.R | Date: 2026-06-09 09:47:06.949497</a:t>
+              <a:t>script_IQSlidedeck.R | Date: 2026-06-25 13:42:34.215137</a:t>
             </a:r>
           </a:p>
         </p:txBody>
@@ -10704,7 +10704,7 @@
           <a:p>
             <a:r>
               <a:rPr/>
-              <a:t>script_IQSlidedeck.R | Date: 2026-06-09 09:47:07.894159</a:t>
+              <a:t>script_IQSlidedeck.R | Date: 2026-06-25 13:42:35.869257</a:t>
             </a:r>
           </a:p>
         </p:txBody>
@@ -11072,7 +11072,7 @@
           <a:p>
             <a:r>
               <a:rPr/>
-              <a:t>script_IQSlidedeck.R | Date: 2026-06-09 09:47:09.029357</a:t>
+              <a:t>script_IQSlidedeck.R | Date: 2026-06-25 13:42:37.091803</a:t>
             </a:r>
           </a:p>
         </p:txBody>
@@ -11262,7 +11262,7 @@
           <a:p>
             <a:r>
               <a:rPr/>
-              <a:t>script_IQSlidedeck.R | Date: 2026-06-09 09:47:17.913721</a:t>
+              <a:t>script_IQSlidedeck.R | Date: 2026-06-25 13:42:47.747289</a:t>
             </a:r>
           </a:p>
         </p:txBody>
@@ -11393,7 +11393,7 @@
           <a:p>
             <a:r>
               <a:rPr/>
-              <a:t>script_IQSlidedeck.R | Date: 2026-06-09 09:47:17.981216</a:t>
+              <a:t>script_IQSlidedeck.R | Date: 2026-06-25 13:42:47.800125</a:t>
             </a:r>
           </a:p>
         </p:txBody>
@@ -11553,7 +11553,7 @@
           <a:p>
             <a:r>
               <a:rPr/>
-              <a:t>script_IQSlidedeck.R | Date: 2026-06-09 09:47:18.055995</a:t>
+              <a:t>script_IQSlidedeck.R | Date: 2026-06-25 13:42:47.859144</a:t>
             </a:r>
           </a:p>
         </p:txBody>
@@ -11691,7 +11691,7 @@
           <a:p>
             <a:r>
               <a:rPr/>
-              <a:t>script_IQSlidedeck.R | Date: 2026-06-09 09:47:18.126241</a:t>
+              <a:t>script_IQSlidedeck.R | Date: 2026-06-25 13:42:47.917594</a:t>
             </a:r>
           </a:p>
         </p:txBody>
@@ -11855,7 +11855,7 @@
           <a:p>
             <a:r>
               <a:rPr/>
-              <a:t>script_IQSlidedeck.R | Date: 2026-06-09 09:47:06.003796</a:t>
+              <a:t>script_IQSlidedeck.R | Date: 2026-06-25 13:42:33.134877</a:t>
             </a:r>
           </a:p>
         </p:txBody>
@@ -12072,7 +12072,7 @@
           <a:p>
             <a:r>
               <a:rPr/>
-              <a:t>script_IQSlidedeck.R | Date: 2026-06-09 09:47:06.191096</a:t>
+              <a:t>script_IQSlidedeck.R | Date: 2026-06-25 13:42:33.318072</a:t>
             </a:r>
           </a:p>
         </p:txBody>
@@ -12177,7 +12177,7 @@
           <a:p>
             <a:r>
               <a:rPr/>
-              <a:t>script_IQSlidedeck.R | Date: 2026-06-09 09:47:10.047847</a:t>
+              <a:t>script_IQSlidedeck.R | Date: 2026-06-25 13:42:38.134802</a:t>
             </a:r>
           </a:p>
         </p:txBody>
@@ -12282,7 +12282,7 @@
           <a:p>
             <a:r>
               <a:rPr/>
-              <a:t>script_IQSlidedeck.R | Date: 2026-06-09 09:47:11.742142</a:t>
+              <a:t>script_IQSlidedeck.R | Date: 2026-06-25 13:42:39.88711</a:t>
             </a:r>
           </a:p>
         </p:txBody>
@@ -12387,7 +12387,7 @@
           <a:p>
             <a:r>
               <a:rPr/>
-              <a:t>script_IQSlidedeck.R | Date: 2026-06-09 09:47:16.873372</a:t>
+              <a:t>script_IQSlidedeck.R | Date: 2026-06-25 13:42:46.922015</a:t>
             </a:r>
           </a:p>
         </p:txBody>
